--- a/public/fun/cards/food/food-19.pptx
+++ b/public/fun/cards/food/food-19.pptx
@@ -3085,7 +3085,7 @@
     <p:bg>
       <p:bgPr>
         <a:solidFill>
-          <a:srgbClr val="274649"/>
+          <a:srgbClr val="E5169B"/>
         </a:solidFill>
         <a:effectLst/>
       </p:bgPr>
@@ -3099,20 +3099,20 @@
       <p:grpSpPr/>
       <p:sp>
         <p:nvSpPr>
-          <p:cNvPr id="2" name="Rectangle 1"/>
+          <p:cNvPr id="2" name="Oval 1"/>
           <p:cNvSpPr/>
           <p:nvPr/>
         </p:nvSpPr>
         <p:spPr>
           <a:xfrm>
-            <a:off x="2196000" y="0"/>
-            <a:ext cx="1044000" cy="1800000"/>
+            <a:off x="547200" y="475200"/>
+            <a:ext cx="849600" cy="849600"/>
           </a:xfrm>
-          <a:prstGeom prst="rect">
+          <a:prstGeom prst="ellipse">
             <a:avLst/>
           </a:prstGeom>
           <a:solidFill>
-            <a:srgbClr val="7DA8AB"/>
+            <a:srgbClr val="EA45AF"/>
           </a:solidFill>
           <a:ln>
             <a:noFill/>
@@ -3128,57 +3128,169 @@
       </p:sp>
       <p:sp>
         <p:nvSpPr>
-          <p:cNvPr id="3" name="Freeform 2"/>
+          <p:cNvPr id="3" name="Oval 2"/>
           <p:cNvSpPr/>
           <p:nvPr/>
         </p:nvSpPr>
         <p:spPr>
           <a:xfrm>
-            <a:off x="2497507" y="488160"/>
-            <a:ext cx="440986" cy="419402"/>
+            <a:off x="187200" y="475200"/>
+            <a:ext cx="849600" cy="849600"/>
           </a:xfrm>
-          <a:custGeom>
+          <a:prstGeom prst="ellipse">
             <a:avLst/>
-            <a:gdLst/>
-            <a:ahLst/>
-            <a:cxnLst/>
-            <a:rect l="l" t="t" r="r" b="b"/>
-            <a:pathLst>
-              <a:path w="440986" h="419402">
-                <a:moveTo>
-                  <a:pt x="220493" y="0"/>
-                </a:moveTo>
-                <a:lnTo>
-                  <a:pt x="276779" y="154369"/>
-                </a:lnTo>
-                <a:lnTo>
-                  <a:pt x="440986" y="160198"/>
-                </a:lnTo>
-                <a:lnTo>
-                  <a:pt x="311566" y="261431"/>
-                </a:lnTo>
-                <a:lnTo>
-                  <a:pt x="356765" y="419402"/>
-                </a:lnTo>
-                <a:lnTo>
-                  <a:pt x="220493" y="327600"/>
-                </a:lnTo>
-                <a:lnTo>
-                  <a:pt x="84221" y="419402"/>
-                </a:lnTo>
-                <a:lnTo>
-                  <a:pt x="129420" y="261431"/>
-                </a:lnTo>
-                <a:lnTo>
-                  <a:pt x="0" y="160198"/>
-                </a:lnTo>
-                <a:lnTo>
-                  <a:pt x="164207" y="154369"/>
-                </a:lnTo>
-                <a:close/>
-              </a:path>
-            </a:pathLst>
-          </a:custGeom>
+          </a:prstGeom>
+          <a:solidFill>
+            <a:srgbClr val="FFFFFF">
+              <a:alpha val="92000"/>
+            </a:srgbClr>
+          </a:solidFill>
+          <a:ln>
+            <a:noFill/>
+          </a:ln>
+        </p:spPr>
+        <p:txBody>
+          <a:bodyPr rtlCol="0" anchor="ctr"/>
+          <a:lstStyle/>
+          <a:p>
+            <a:pPr algn="ctr"/>
+          </a:p>
+        </p:txBody>
+      </p:sp>
+      <p:sp>
+        <p:nvSpPr>
+          <p:cNvPr id="4" name="텍스트"/>
+          <p:cNvSpPr txBox="1"/>
+          <p:nvPr/>
+        </p:nvSpPr>
+        <p:spPr>
+          <a:xfrm>
+            <a:off x="1692000" y="223200"/>
+            <a:ext cx="1296000" cy="133351"/>
+          </a:xfrm>
+          <a:prstGeom prst="rect">
+            <a:avLst/>
+          </a:prstGeom>
+          <a:noFill/>
+        </p:spPr>
+        <p:txBody>
+          <a:bodyPr wrap="square" lIns="0" rIns="0" tIns="0" bIns="0" anchor="t">
+            <a:spAutoFit/>
+          </a:bodyPr>
+          <a:lstStyle/>
+          <a:p>
+            <a:pPr algn="l">
+              <a:lnSpc>
+                <a:spcPts val="1015"/>
+              </a:lnSpc>
+            </a:pPr>
+            <a:r>
+              <a:rPr sz="700" b="1" spc="200">
+                <a:solidFill>
+                  <a:srgbClr val="F8C5E6"/>
+                </a:solidFill>
+                <a:latin typeface="맑은 고딕"/>
+                <a:ea typeface="맑은 고딕"/>
+              </a:rPr>
+              <a:t>상호명</a:t>
+            </a:r>
+          </a:p>
+        </p:txBody>
+      </p:sp>
+      <p:sp>
+        <p:nvSpPr>
+          <p:cNvPr id="5" name="텍스트"/>
+          <p:cNvSpPr txBox="1"/>
+          <p:nvPr/>
+        </p:nvSpPr>
+        <p:spPr>
+          <a:xfrm>
+            <a:off x="1692000" y="540000"/>
+            <a:ext cx="1368000" cy="360000"/>
+          </a:xfrm>
+          <a:prstGeom prst="rect">
+            <a:avLst/>
+          </a:prstGeom>
+          <a:noFill/>
+        </p:spPr>
+        <p:txBody>
+          <a:bodyPr wrap="square" lIns="0" rIns="0" tIns="0" bIns="0" anchor="t">
+            <a:spAutoFit/>
+          </a:bodyPr>
+          <a:lstStyle/>
+          <a:p>
+            <a:pPr algn="l">
+              <a:lnSpc>
+                <a:spcPts val="3190"/>
+              </a:lnSpc>
+            </a:pPr>
+            <a:r>
+              <a:rPr sz="2200" b="1">
+                <a:solidFill>
+                  <a:srgbClr val="FFFFFF"/>
+                </a:solidFill>
+                <a:latin typeface="맑은 고딕"/>
+                <a:ea typeface="맑은 고딕"/>
+              </a:rPr>
+              <a:t>전보라</a:t>
+            </a:r>
+          </a:p>
+        </p:txBody>
+      </p:sp>
+      <p:sp>
+        <p:nvSpPr>
+          <p:cNvPr id="6" name="텍스트"/>
+          <p:cNvSpPr txBox="1"/>
+          <p:nvPr/>
+        </p:nvSpPr>
+        <p:spPr>
+          <a:xfrm>
+            <a:off x="1692000" y="943200"/>
+            <a:ext cx="1368000" cy="171451"/>
+          </a:xfrm>
+          <a:prstGeom prst="rect">
+            <a:avLst/>
+          </a:prstGeom>
+          <a:noFill/>
+        </p:spPr>
+        <p:txBody>
+          <a:bodyPr wrap="square" lIns="0" rIns="0" tIns="0" bIns="0" anchor="t">
+            <a:spAutoFit/>
+          </a:bodyPr>
+          <a:lstStyle/>
+          <a:p>
+            <a:pPr algn="l">
+              <a:lnSpc>
+                <a:spcPts val="1305"/>
+              </a:lnSpc>
+            </a:pPr>
+            <a:r>
+              <a:rPr sz="900" b="0">
+                <a:solidFill>
+                  <a:srgbClr val="F8C5E6"/>
+                </a:solidFill>
+                <a:latin typeface="맑은 고딕"/>
+                <a:ea typeface="맑은 고딕"/>
+              </a:rPr>
+              <a:t>브런치 카페 대표</a:t>
+            </a:r>
+          </a:p>
+        </p:txBody>
+      </p:sp>
+      <p:sp>
+        <p:nvSpPr>
+          <p:cNvPr id="7" name="Rectangle 6"/>
+          <p:cNvSpPr/>
+          <p:nvPr/>
+        </p:nvSpPr>
+        <p:spPr>
+          <a:xfrm>
+            <a:off x="1692000" y="1195200"/>
+            <a:ext cx="144000" cy="18000"/>
+          </a:xfrm>
+          <a:prstGeom prst="rect">
+            <a:avLst/>
+          </a:prstGeom>
           <a:solidFill>
             <a:srgbClr val="FFFFFF"/>
           </a:solidFill>
@@ -3196,14 +3308,14 @@
       </p:sp>
       <p:sp>
         <p:nvSpPr>
-          <p:cNvPr id="4" name="텍스트"/>
+          <p:cNvPr id="8" name="텍스트"/>
           <p:cNvSpPr txBox="1"/>
           <p:nvPr/>
         </p:nvSpPr>
         <p:spPr>
           <a:xfrm>
-            <a:off x="2268000" y="1224000"/>
-            <a:ext cx="900000" cy="216000"/>
+            <a:off x="1692000" y="1328400"/>
+            <a:ext cx="331200" cy="99061"/>
           </a:xfrm>
           <a:prstGeom prst="rect">
             <a:avLst/>
@@ -3216,34 +3328,34 @@
           </a:bodyPr>
           <a:lstStyle/>
           <a:p>
-            <a:pPr algn="ctr">
+            <a:pPr algn="l">
               <a:lnSpc>
-                <a:spcPts val="1160"/>
+                <a:spcPts val="754"/>
               </a:lnSpc>
             </a:pPr>
             <a:r>
-              <a:rPr sz="800" b="1" spc="150">
+              <a:rPr sz="520" b="1" spc="120">
                 <a:solidFill>
-                  <a:srgbClr val="FFFFFF"/>
+                  <a:srgbClr val="F8C5E6"/>
                 </a:solidFill>
                 <a:latin typeface="맑은 고딕"/>
                 <a:ea typeface="맑은 고딕"/>
               </a:rPr>
-              <a:t>상호명</a:t>
-            </a:r>
-          </a:p>
-        </p:txBody>
-      </p:sp>
-      <p:sp>
-        <p:nvSpPr>
-          <p:cNvPr id="5" name="텍스트"/>
+              <a:t>TEL</a:t>
+            </a:r>
+          </a:p>
+        </p:txBody>
+      </p:sp>
+      <p:sp>
+        <p:nvSpPr>
+          <p:cNvPr id="9" name="텍스트"/>
           <p:cNvSpPr txBox="1"/>
           <p:nvPr/>
         </p:nvSpPr>
         <p:spPr>
           <a:xfrm>
-            <a:off x="216000" y="331200"/>
-            <a:ext cx="1872000" cy="313692"/>
+            <a:off x="2023200" y="1317600"/>
+            <a:ext cx="1188000" cy="125731"/>
           </a:xfrm>
           <a:prstGeom prst="rect">
             <a:avLst/>
@@ -3258,160 +3370,11 @@
           <a:p>
             <a:pPr algn="l">
               <a:lnSpc>
-                <a:spcPts val="2755"/>
+                <a:spcPts val="956"/>
               </a:lnSpc>
             </a:pPr>
             <a:r>
-              <a:rPr sz="1900" b="1" spc="50">
-                <a:solidFill>
-                  <a:srgbClr val="FFFFFF"/>
-                </a:solidFill>
-                <a:latin typeface="맑은 고딕"/>
-                <a:ea typeface="맑은 고딕"/>
-              </a:rPr>
-              <a:t>전보라</a:t>
-            </a:r>
-          </a:p>
-        </p:txBody>
-      </p:sp>
-      <p:sp>
-        <p:nvSpPr>
-          <p:cNvPr id="6" name="텍스트"/>
-          <p:cNvSpPr txBox="1"/>
-          <p:nvPr/>
-        </p:nvSpPr>
-        <p:spPr>
-          <a:xfrm>
-            <a:off x="216000" y="619200"/>
-            <a:ext cx="1872000" cy="122400"/>
-          </a:xfrm>
-          <a:prstGeom prst="rect">
-            <a:avLst/>
-          </a:prstGeom>
-          <a:noFill/>
-        </p:spPr>
-        <p:txBody>
-          <a:bodyPr wrap="square" lIns="0" rIns="0" tIns="0" bIns="0" anchor="t">
-            <a:spAutoFit/>
-          </a:bodyPr>
-          <a:lstStyle/>
-          <a:p>
-            <a:pPr algn="l">
-              <a:lnSpc>
-                <a:spcPts val="1232"/>
-              </a:lnSpc>
-            </a:pPr>
-            <a:r>
-              <a:rPr sz="850" b="1">
-                <a:solidFill>
-                  <a:srgbClr val="90B5B8"/>
-                </a:solidFill>
-                <a:latin typeface="맑은 고딕"/>
-                <a:ea typeface="맑은 고딕"/>
-              </a:rPr>
-              <a:t>브런치 카페 대표</a:t>
-            </a:r>
-          </a:p>
-        </p:txBody>
-      </p:sp>
-      <p:sp>
-        <p:nvSpPr>
-          <p:cNvPr id="7" name="Rectangle 6"/>
-          <p:cNvSpPr/>
-          <p:nvPr/>
-        </p:nvSpPr>
-        <p:spPr>
-          <a:xfrm>
-            <a:off x="216000" y="828000"/>
-            <a:ext cx="201600" cy="14400"/>
-          </a:xfrm>
-          <a:prstGeom prst="rect">
-            <a:avLst/>
-          </a:prstGeom>
-          <a:solidFill>
-            <a:srgbClr val="7DA8AB"/>
-          </a:solidFill>
-          <a:ln>
-            <a:noFill/>
-          </a:ln>
-        </p:spPr>
-        <p:txBody>
-          <a:bodyPr rtlCol="0" anchor="ctr"/>
-          <a:lstStyle/>
-          <a:p>
-            <a:pPr algn="ctr"/>
-          </a:p>
-        </p:txBody>
-      </p:sp>
-      <p:sp>
-        <p:nvSpPr>
-          <p:cNvPr id="8" name="텍스트"/>
-          <p:cNvSpPr txBox="1"/>
-          <p:nvPr/>
-        </p:nvSpPr>
-        <p:spPr>
-          <a:xfrm>
-            <a:off x="216000" y="1008000"/>
-            <a:ext cx="122400" cy="168911"/>
-          </a:xfrm>
-          <a:prstGeom prst="rect">
-            <a:avLst/>
-          </a:prstGeom>
-          <a:noFill/>
-        </p:spPr>
-        <p:txBody>
-          <a:bodyPr wrap="square" lIns="0" rIns="0" tIns="0" bIns="0" anchor="t">
-            <a:spAutoFit/>
-          </a:bodyPr>
-          <a:lstStyle/>
-          <a:p>
-            <a:pPr algn="l">
-              <a:lnSpc>
-                <a:spcPts val="1015"/>
-              </a:lnSpc>
-            </a:pPr>
-            <a:r>
-              <a:rPr sz="700" b="1">
-                <a:solidFill>
-                  <a:srgbClr val="90B5B8"/>
-                </a:solidFill>
-                <a:latin typeface="맑은 고딕"/>
-                <a:ea typeface="맑은 고딕"/>
-              </a:rPr>
-              <a:t>T</a:t>
-            </a:r>
-          </a:p>
-        </p:txBody>
-      </p:sp>
-      <p:sp>
-        <p:nvSpPr>
-          <p:cNvPr id="9" name="텍스트"/>
-          <p:cNvSpPr txBox="1"/>
-          <p:nvPr/>
-        </p:nvSpPr>
-        <p:spPr>
-          <a:xfrm>
-            <a:off x="360000" y="1008000"/>
-            <a:ext cx="1584000" cy="168911"/>
-          </a:xfrm>
-          <a:prstGeom prst="rect">
-            <a:avLst/>
-          </a:prstGeom>
-          <a:noFill/>
-        </p:spPr>
-        <p:txBody>
-          <a:bodyPr wrap="square" lIns="0" rIns="0" tIns="0" bIns="0" anchor="t">
-            <a:spAutoFit/>
-          </a:bodyPr>
-          <a:lstStyle/>
-          <a:p>
-            <a:pPr algn="l">
-              <a:lnSpc>
-                <a:spcPts val="1015"/>
-              </a:lnSpc>
-            </a:pPr>
-            <a:r>
-              <a:rPr sz="700" b="0">
+              <a:rPr sz="660" b="0">
                 <a:solidFill>
                   <a:srgbClr val="FFFFFF"/>
                 </a:solidFill>
@@ -3431,8 +3394,8 @@
         </p:nvSpPr>
         <p:spPr>
           <a:xfrm>
-            <a:off x="216000" y="1176911"/>
-            <a:ext cx="122400" cy="168911"/>
+            <a:off x="1692000" y="1458000"/>
+            <a:ext cx="331200" cy="99061"/>
           </a:xfrm>
           <a:prstGeom prst="rect">
             <a:avLst/>
@@ -3447,18 +3410,18 @@
           <a:p>
             <a:pPr algn="l">
               <a:lnSpc>
-                <a:spcPts val="1015"/>
+                <a:spcPts val="754"/>
               </a:lnSpc>
             </a:pPr>
             <a:r>
-              <a:rPr sz="700" b="1">
+              <a:rPr sz="520" b="1" spc="120">
                 <a:solidFill>
-                  <a:srgbClr val="90B5B8"/>
+                  <a:srgbClr val="F8C5E6"/>
                 </a:solidFill>
                 <a:latin typeface="맑은 고딕"/>
                 <a:ea typeface="맑은 고딕"/>
               </a:rPr>
-              <a:t>E</a:t>
+              <a:t>MAIL</a:t>
             </a:r>
           </a:p>
         </p:txBody>
@@ -3471,8 +3434,8 @@
         </p:nvSpPr>
         <p:spPr>
           <a:xfrm>
-            <a:off x="360000" y="1176911"/>
-            <a:ext cx="1584000" cy="168911"/>
+            <a:off x="2023200" y="1447200"/>
+            <a:ext cx="1188000" cy="125731"/>
           </a:xfrm>
           <a:prstGeom prst="rect">
             <a:avLst/>
@@ -3487,11 +3450,11 @@
           <a:p>
             <a:pPr algn="l">
               <a:lnSpc>
-                <a:spcPts val="1015"/>
+                <a:spcPts val="956"/>
               </a:lnSpc>
             </a:pPr>
             <a:r>
-              <a:rPr sz="700" b="0">
+              <a:rPr sz="660" b="0">
                 <a:solidFill>
                   <a:srgbClr val="FFFFFF"/>
                 </a:solidFill>
@@ -3511,8 +3474,8 @@
         </p:nvSpPr>
         <p:spPr>
           <a:xfrm>
-            <a:off x="216000" y="1345822"/>
-            <a:ext cx="122400" cy="168911"/>
+            <a:off x="1692000" y="1587600"/>
+            <a:ext cx="331200" cy="99061"/>
           </a:xfrm>
           <a:prstGeom prst="rect">
             <a:avLst/>
@@ -3527,18 +3490,18 @@
           <a:p>
             <a:pPr algn="l">
               <a:lnSpc>
-                <a:spcPts val="1015"/>
+                <a:spcPts val="754"/>
               </a:lnSpc>
             </a:pPr>
             <a:r>
-              <a:rPr sz="700" b="1">
+              <a:rPr sz="520" b="1" spc="120">
                 <a:solidFill>
-                  <a:srgbClr val="90B5B8"/>
+                  <a:srgbClr val="F8C5E6"/>
                 </a:solidFill>
                 <a:latin typeface="맑은 고딕"/>
                 <a:ea typeface="맑은 고딕"/>
               </a:rPr>
-              <a:t>A</a:t>
+              <a:t>ADDR</a:t>
             </a:r>
           </a:p>
         </p:txBody>
@@ -3551,8 +3514,8 @@
         </p:nvSpPr>
         <p:spPr>
           <a:xfrm>
-            <a:off x="360000" y="1345822"/>
-            <a:ext cx="1584000" cy="168911"/>
+            <a:off x="2023200" y="1576800"/>
+            <a:ext cx="1188000" cy="125731"/>
           </a:xfrm>
           <a:prstGeom prst="rect">
             <a:avLst/>
@@ -3567,11 +3530,11 @@
           <a:p>
             <a:pPr algn="l">
               <a:lnSpc>
-                <a:spcPts val="1015"/>
+                <a:spcPts val="956"/>
               </a:lnSpc>
             </a:pPr>
             <a:r>
-              <a:rPr sz="700" b="0">
+              <a:rPr sz="660" b="0">
                 <a:solidFill>
                   <a:srgbClr val="FFFFFF"/>
                 </a:solidFill>
@@ -3597,7 +3560,7 @@
     <p:bg>
       <p:bgPr>
         <a:solidFill>
-          <a:srgbClr val="F2F7F8"/>
+          <a:srgbClr val="FFFFFF"/>
         </a:solidFill>
         <a:effectLst/>
       </p:bgPr>
@@ -3611,23 +3574,23 @@
       <p:grpSpPr/>
       <p:sp>
         <p:nvSpPr>
-          <p:cNvPr id="2" name="Rectangle 1"/>
+          <p:cNvPr id="2" name="Oval 1"/>
           <p:cNvSpPr/>
           <p:nvPr/>
         </p:nvSpPr>
         <p:spPr>
           <a:xfrm>
-            <a:off x="108000" y="108000"/>
-            <a:ext cx="3024000" cy="1584000"/>
+            <a:off x="1591200" y="511200"/>
+            <a:ext cx="57600" cy="57600"/>
           </a:xfrm>
-          <a:prstGeom prst="rect">
+          <a:prstGeom prst="ellipse">
             <a:avLst/>
           </a:prstGeom>
-          <a:noFill/>
-          <a:ln w="10800">
-            <a:solidFill>
-              <a:srgbClr val="4B868B"/>
-            </a:solidFill>
+          <a:solidFill>
+            <a:srgbClr val="E5169B"/>
+          </a:solidFill>
+          <a:ln>
+            <a:noFill/>
           </a:ln>
         </p:spPr>
         <p:txBody>
@@ -3646,8 +3609,8 @@
         </p:nvSpPr>
         <p:spPr>
           <a:xfrm>
-            <a:off x="396000" y="504000"/>
-            <a:ext cx="2448000" cy="432000"/>
+            <a:off x="396000" y="684000"/>
+            <a:ext cx="2448000" cy="504000"/>
           </a:xfrm>
           <a:prstGeom prst="rect">
             <a:avLst/>
@@ -3655,7 +3618,7 @@
           <a:noFill/>
         </p:spPr>
         <p:txBody>
-          <a:bodyPr wrap="square" lIns="0" rIns="0" tIns="0" bIns="0" anchor="ctr">
+          <a:bodyPr wrap="square" lIns="0" rIns="0" tIns="0" bIns="0" anchor="t">
             <a:spAutoFit/>
           </a:bodyPr>
           <a:lstStyle/>
@@ -3668,7 +3631,7 @@
             <a:r>
               <a:rPr sz="1200" b="1">
                 <a:solidFill>
-                  <a:srgbClr val="274649"/>
+                  <a:srgbClr val="12151C"/>
                 </a:solidFill>
                 <a:latin typeface="맑은 고딕"/>
                 <a:ea typeface="맑은 고딕"/>
@@ -3678,66 +3641,16 @@
           </a:p>
         </p:txBody>
       </p:sp>
-      <p:cxnSp>
-        <p:nvCxnSpPr>
-          <p:cNvPr id="4" name="Connector 3"/>
-          <p:cNvCxnSpPr/>
+      <p:sp>
+        <p:nvSpPr>
+          <p:cNvPr id="4" name="텍스트"/>
+          <p:cNvSpPr txBox="1"/>
           <p:nvPr/>
-        </p:nvCxnSpPr>
+        </p:nvSpPr>
         <p:spPr>
           <a:xfrm>
-            <a:off x="1260000" y="1080000"/>
-            <a:ext cx="684000" cy="0"/>
-          </a:xfrm>
-          <a:prstGeom prst="line">
-            <a:avLst/>
-          </a:prstGeom>
-          <a:ln w="7200">
-            <a:solidFill>
-              <a:srgbClr val="4B868B"/>
-            </a:solidFill>
-          </a:ln>
-        </p:spPr>
-      </p:cxnSp>
-      <p:sp>
-        <p:nvSpPr>
-          <p:cNvPr id="5" name="Oval 4"/>
-          <p:cNvSpPr/>
-          <p:nvPr/>
-        </p:nvSpPr>
-        <p:spPr>
-          <a:xfrm>
-            <a:off x="1594800" y="1054800"/>
-            <a:ext cx="50400" cy="50400"/>
-          </a:xfrm>
-          <a:prstGeom prst="ellipse">
-            <a:avLst/>
-          </a:prstGeom>
-          <a:solidFill>
-            <a:srgbClr val="4B868B"/>
-          </a:solidFill>
-          <a:ln>
-            <a:noFill/>
-          </a:ln>
-        </p:spPr>
-        <p:txBody>
-          <a:bodyPr rtlCol="0" anchor="ctr"/>
-          <a:lstStyle/>
-          <a:p>
-            <a:pPr algn="ctr"/>
-          </a:p>
-        </p:txBody>
-      </p:sp>
-      <p:sp>
-        <p:nvSpPr>
-          <p:cNvPr id="6" name="텍스트"/>
-          <p:cNvSpPr txBox="1"/>
-          <p:nvPr/>
-        </p:nvSpPr>
-        <p:spPr>
-          <a:xfrm>
-            <a:off x="360000" y="1224000"/>
-            <a:ext cx="2520000" cy="108000"/>
+            <a:off x="360000" y="1339200"/>
+            <a:ext cx="2520000" cy="123826"/>
           </a:xfrm>
           <a:prstGeom prst="rect">
             <a:avLst/>
@@ -3752,87 +3665,19 @@
           <a:p>
             <a:pPr algn="ctr">
               <a:lnSpc>
-                <a:spcPts val="1087"/>
+                <a:spcPts val="942"/>
               </a:lnSpc>
             </a:pPr>
             <a:r>
-              <a:rPr sz="750" b="1" spc="300">
+              <a:rPr sz="650" b="1" spc="300">
                 <a:solidFill>
-                  <a:srgbClr val="5E7072"/>
+                  <a:srgbClr val="6B7280"/>
                 </a:solidFill>
                 <a:latin typeface="맑은 고딕"/>
                 <a:ea typeface="맑은 고딕"/>
               </a:rPr>
               <a:t>상호명</a:t>
             </a:r>
-          </a:p>
-        </p:txBody>
-      </p:sp>
-      <p:sp>
-        <p:nvSpPr>
-          <p:cNvPr id="7" name="Freeform 6"/>
-          <p:cNvSpPr/>
-          <p:nvPr/>
-        </p:nvSpPr>
-        <p:spPr>
-          <a:xfrm>
-            <a:off x="1541253" y="241200"/>
-            <a:ext cx="157494" cy="149787"/>
-          </a:xfrm>
-          <a:custGeom>
-            <a:avLst/>
-            <a:gdLst/>
-            <a:ahLst/>
-            <a:cxnLst/>
-            <a:rect l="l" t="t" r="r" b="b"/>
-            <a:pathLst>
-              <a:path w="157494" h="149787">
-                <a:moveTo>
-                  <a:pt x="78747" y="0"/>
-                </a:moveTo>
-                <a:lnTo>
-                  <a:pt x="98849" y="55132"/>
-                </a:lnTo>
-                <a:lnTo>
-                  <a:pt x="157494" y="57213"/>
-                </a:lnTo>
-                <a:lnTo>
-                  <a:pt x="111273" y="93368"/>
-                </a:lnTo>
-                <a:lnTo>
-                  <a:pt x="127416" y="149787"/>
-                </a:lnTo>
-                <a:lnTo>
-                  <a:pt x="78747" y="117000"/>
-                </a:lnTo>
-                <a:lnTo>
-                  <a:pt x="30078" y="149787"/>
-                </a:lnTo>
-                <a:lnTo>
-                  <a:pt x="46221" y="93368"/>
-                </a:lnTo>
-                <a:lnTo>
-                  <a:pt x="0" y="57213"/>
-                </a:lnTo>
-                <a:lnTo>
-                  <a:pt x="58645" y="55132"/>
-                </a:lnTo>
-                <a:close/>
-              </a:path>
-            </a:pathLst>
-          </a:custGeom>
-          <a:solidFill>
-            <a:srgbClr val="4B868B"/>
-          </a:solidFill>
-          <a:ln>
-            <a:noFill/>
-          </a:ln>
-        </p:spPr>
-        <p:txBody>
-          <a:bodyPr rtlCol="0" anchor="ctr"/>
-          <a:lstStyle/>
-          <a:p>
-            <a:pPr algn="ctr"/>
           </a:p>
         </p:txBody>
       </p:sp>

--- a/public/fun/cards/food/food-19.pptx
+++ b/public/fun/cards/food/food-19.pptx
@@ -3097,196 +3097,37 @@
         <p:nvPr/>
       </p:nvGrpSpPr>
       <p:grpSpPr/>
-      <p:sp>
-        <p:nvSpPr>
-          <p:cNvPr id="2" name="Oval 1"/>
+      <p:cxnSp>
+        <p:nvCxnSpPr>
+          <p:cNvPr id="2" name="Connector 1"/>
+          <p:cNvCxnSpPr/>
+          <p:nvPr/>
+        </p:nvCxnSpPr>
+        <p:spPr>
+          <a:xfrm>
+            <a:off x="1080000" y="252000"/>
+            <a:ext cx="0" cy="1296000"/>
+          </a:xfrm>
+          <a:prstGeom prst="line">
+            <a:avLst/>
+          </a:prstGeom>
+          <a:ln w="3600">
+            <a:solidFill>
+              <a:srgbClr val="EF73C3"/>
+            </a:solidFill>
+          </a:ln>
+        </p:spPr>
+      </p:cxnSp>
+      <p:sp>
+        <p:nvSpPr>
+          <p:cNvPr id="3" name="Rectangle 2"/>
           <p:cNvSpPr/>
           <p:nvPr/>
         </p:nvSpPr>
         <p:spPr>
           <a:xfrm>
-            <a:off x="547200" y="475200"/>
-            <a:ext cx="849600" cy="849600"/>
-          </a:xfrm>
-          <a:prstGeom prst="ellipse">
-            <a:avLst/>
-          </a:prstGeom>
-          <a:solidFill>
-            <a:srgbClr val="EA45AF"/>
-          </a:solidFill>
-          <a:ln>
-            <a:noFill/>
-          </a:ln>
-        </p:spPr>
-        <p:txBody>
-          <a:bodyPr rtlCol="0" anchor="ctr"/>
-          <a:lstStyle/>
-          <a:p>
-            <a:pPr algn="ctr"/>
-          </a:p>
-        </p:txBody>
-      </p:sp>
-      <p:sp>
-        <p:nvSpPr>
-          <p:cNvPr id="3" name="Oval 2"/>
-          <p:cNvSpPr/>
-          <p:nvPr/>
-        </p:nvSpPr>
-        <p:spPr>
-          <a:xfrm>
-            <a:off x="187200" y="475200"/>
-            <a:ext cx="849600" cy="849600"/>
-          </a:xfrm>
-          <a:prstGeom prst="ellipse">
-            <a:avLst/>
-          </a:prstGeom>
-          <a:solidFill>
-            <a:srgbClr val="FFFFFF">
-              <a:alpha val="92000"/>
-            </a:srgbClr>
-          </a:solidFill>
-          <a:ln>
-            <a:noFill/>
-          </a:ln>
-        </p:spPr>
-        <p:txBody>
-          <a:bodyPr rtlCol="0" anchor="ctr"/>
-          <a:lstStyle/>
-          <a:p>
-            <a:pPr algn="ctr"/>
-          </a:p>
-        </p:txBody>
-      </p:sp>
-      <p:sp>
-        <p:nvSpPr>
-          <p:cNvPr id="4" name="텍스트"/>
-          <p:cNvSpPr txBox="1"/>
-          <p:nvPr/>
-        </p:nvSpPr>
-        <p:spPr>
-          <a:xfrm>
-            <a:off x="1692000" y="223200"/>
-            <a:ext cx="1296000" cy="133351"/>
-          </a:xfrm>
-          <a:prstGeom prst="rect">
-            <a:avLst/>
-          </a:prstGeom>
-          <a:noFill/>
-        </p:spPr>
-        <p:txBody>
-          <a:bodyPr wrap="square" lIns="0" rIns="0" tIns="0" bIns="0" anchor="t">
-            <a:spAutoFit/>
-          </a:bodyPr>
-          <a:lstStyle/>
-          <a:p>
-            <a:pPr algn="l">
-              <a:lnSpc>
-                <a:spcPts val="1015"/>
-              </a:lnSpc>
-            </a:pPr>
-            <a:r>
-              <a:rPr sz="700" b="1" spc="200">
-                <a:solidFill>
-                  <a:srgbClr val="F8C5E6"/>
-                </a:solidFill>
-                <a:latin typeface="맑은 고딕"/>
-                <a:ea typeface="맑은 고딕"/>
-              </a:rPr>
-              <a:t>상호명</a:t>
-            </a:r>
-          </a:p>
-        </p:txBody>
-      </p:sp>
-      <p:sp>
-        <p:nvSpPr>
-          <p:cNvPr id="5" name="텍스트"/>
-          <p:cNvSpPr txBox="1"/>
-          <p:nvPr/>
-        </p:nvSpPr>
-        <p:spPr>
-          <a:xfrm>
-            <a:off x="1692000" y="540000"/>
-            <a:ext cx="1368000" cy="360000"/>
-          </a:xfrm>
-          <a:prstGeom prst="rect">
-            <a:avLst/>
-          </a:prstGeom>
-          <a:noFill/>
-        </p:spPr>
-        <p:txBody>
-          <a:bodyPr wrap="square" lIns="0" rIns="0" tIns="0" bIns="0" anchor="t">
-            <a:spAutoFit/>
-          </a:bodyPr>
-          <a:lstStyle/>
-          <a:p>
-            <a:pPr algn="l">
-              <a:lnSpc>
-                <a:spcPts val="3190"/>
-              </a:lnSpc>
-            </a:pPr>
-            <a:r>
-              <a:rPr sz="2200" b="1">
-                <a:solidFill>
-                  <a:srgbClr val="FFFFFF"/>
-                </a:solidFill>
-                <a:latin typeface="맑은 고딕"/>
-                <a:ea typeface="맑은 고딕"/>
-              </a:rPr>
-              <a:t>전보라</a:t>
-            </a:r>
-          </a:p>
-        </p:txBody>
-      </p:sp>
-      <p:sp>
-        <p:nvSpPr>
-          <p:cNvPr id="6" name="텍스트"/>
-          <p:cNvSpPr txBox="1"/>
-          <p:nvPr/>
-        </p:nvSpPr>
-        <p:spPr>
-          <a:xfrm>
-            <a:off x="1692000" y="943200"/>
-            <a:ext cx="1368000" cy="171451"/>
-          </a:xfrm>
-          <a:prstGeom prst="rect">
-            <a:avLst/>
-          </a:prstGeom>
-          <a:noFill/>
-        </p:spPr>
-        <p:txBody>
-          <a:bodyPr wrap="square" lIns="0" rIns="0" tIns="0" bIns="0" anchor="t">
-            <a:spAutoFit/>
-          </a:bodyPr>
-          <a:lstStyle/>
-          <a:p>
-            <a:pPr algn="l">
-              <a:lnSpc>
-                <a:spcPts val="1305"/>
-              </a:lnSpc>
-            </a:pPr>
-            <a:r>
-              <a:rPr sz="900" b="0">
-                <a:solidFill>
-                  <a:srgbClr val="F8C5E6"/>
-                </a:solidFill>
-                <a:latin typeface="맑은 고딕"/>
-                <a:ea typeface="맑은 고딕"/>
-              </a:rPr>
-              <a:t>브런치 카페 대표</a:t>
-            </a:r>
-          </a:p>
-        </p:txBody>
-      </p:sp>
-      <p:sp>
-        <p:nvSpPr>
-          <p:cNvPr id="7" name="Rectangle 6"/>
-          <p:cNvSpPr/>
-          <p:nvPr/>
-        </p:nvSpPr>
-        <p:spPr>
-          <a:xfrm>
-            <a:off x="1692000" y="1195200"/>
-            <a:ext cx="144000" cy="18000"/>
+            <a:off x="1069200" y="252000"/>
+            <a:ext cx="21600" cy="201600"/>
           </a:xfrm>
           <a:prstGeom prst="rect">
             <a:avLst/>
@@ -3308,14 +3149,14 @@
       </p:sp>
       <p:sp>
         <p:nvSpPr>
-          <p:cNvPr id="8" name="텍스트"/>
+          <p:cNvPr id="4" name="텍스트"/>
           <p:cNvSpPr txBox="1"/>
           <p:nvPr/>
         </p:nvSpPr>
         <p:spPr>
           <a:xfrm>
-            <a:off x="1692000" y="1328400"/>
-            <a:ext cx="331200" cy="99061"/>
+            <a:off x="252000" y="252000"/>
+            <a:ext cx="756000" cy="123826"/>
           </a:xfrm>
           <a:prstGeom prst="rect">
             <a:avLst/>
@@ -3330,11 +3171,221 @@
           <a:p>
             <a:pPr algn="l">
               <a:lnSpc>
-                <a:spcPts val="754"/>
+                <a:spcPts val="942"/>
               </a:lnSpc>
             </a:pPr>
             <a:r>
-              <a:rPr sz="520" b="1" spc="120">
+              <a:rPr sz="650" b="1" spc="220">
+                <a:solidFill>
+                  <a:srgbClr val="F8C5E6"/>
+                </a:solidFill>
+                <a:latin typeface="맑은 고딕"/>
+                <a:ea typeface="맑은 고딕"/>
+              </a:rPr>
+              <a:t>상호명</a:t>
+            </a:r>
+          </a:p>
+        </p:txBody>
+      </p:sp>
+      <p:sp>
+        <p:nvSpPr>
+          <p:cNvPr id="5" name="Oval 4"/>
+          <p:cNvSpPr/>
+          <p:nvPr/>
+        </p:nvSpPr>
+        <p:spPr>
+          <a:xfrm>
+            <a:off x="273600" y="734400"/>
+            <a:ext cx="244800" cy="244800"/>
+          </a:xfrm>
+          <a:prstGeom prst="ellipse">
+            <a:avLst/>
+          </a:prstGeom>
+          <a:noFill/>
+          <a:ln w="5040">
+            <a:solidFill>
+              <a:srgbClr val="FFFFFF"/>
+            </a:solidFill>
+          </a:ln>
+        </p:spPr>
+        <p:txBody>
+          <a:bodyPr rtlCol="0" anchor="ctr"/>
+          <a:lstStyle/>
+          <a:p>
+            <a:pPr algn="ctr"/>
+          </a:p>
+        </p:txBody>
+      </p:sp>
+      <p:sp>
+        <p:nvSpPr>
+          <p:cNvPr id="6" name="텍스트"/>
+          <p:cNvSpPr txBox="1"/>
+          <p:nvPr/>
+        </p:nvSpPr>
+        <p:spPr>
+          <a:xfrm>
+            <a:off x="252000" y="734400"/>
+            <a:ext cx="288000" cy="252000"/>
+          </a:xfrm>
+          <a:prstGeom prst="rect">
+            <a:avLst/>
+          </a:prstGeom>
+          <a:noFill/>
+        </p:spPr>
+        <p:txBody>
+          <a:bodyPr wrap="square" lIns="0" rIns="0" tIns="0" bIns="0" anchor="ctr">
+            <a:spAutoFit/>
+          </a:bodyPr>
+          <a:lstStyle/>
+          <a:p>
+            <a:pPr algn="ctr">
+              <a:lnSpc>
+                <a:spcPts val="1305"/>
+              </a:lnSpc>
+            </a:pPr>
+            <a:r>
+              <a:rPr sz="900" b="1">
+                <a:solidFill>
+                  <a:srgbClr val="FFFFFF"/>
+                </a:solidFill>
+                <a:latin typeface="맑은 고딕"/>
+                <a:ea typeface="맑은 고딕"/>
+              </a:rPr>
+              <a:t>상</a:t>
+            </a:r>
+          </a:p>
+        </p:txBody>
+      </p:sp>
+      <p:sp>
+        <p:nvSpPr>
+          <p:cNvPr id="7" name="텍스트"/>
+          <p:cNvSpPr txBox="1"/>
+          <p:nvPr/>
+        </p:nvSpPr>
+        <p:spPr>
+          <a:xfrm>
+            <a:off x="1260000" y="432000"/>
+            <a:ext cx="1800000" cy="237600"/>
+          </a:xfrm>
+          <a:prstGeom prst="rect">
+            <a:avLst/>
+          </a:prstGeom>
+          <a:noFill/>
+        </p:spPr>
+        <p:txBody>
+          <a:bodyPr wrap="square" lIns="0" rIns="0" tIns="0" bIns="0" anchor="t">
+            <a:spAutoFit/>
+          </a:bodyPr>
+          <a:lstStyle/>
+          <a:p>
+            <a:pPr algn="l">
+              <a:lnSpc>
+                <a:spcPts val="1957"/>
+              </a:lnSpc>
+            </a:pPr>
+            <a:r>
+              <a:rPr sz="1350" b="1" spc="120">
+                <a:solidFill>
+                  <a:srgbClr val="FFFFFF"/>
+                </a:solidFill>
+                <a:latin typeface="맑은 고딕"/>
+                <a:ea typeface="맑은 고딕"/>
+              </a:rPr>
+              <a:t>전보라</a:t>
+            </a:r>
+          </a:p>
+        </p:txBody>
+      </p:sp>
+      <p:sp>
+        <p:nvSpPr>
+          <p:cNvPr id="8" name="텍스트"/>
+          <p:cNvSpPr txBox="1"/>
+          <p:nvPr/>
+        </p:nvSpPr>
+        <p:spPr>
+          <a:xfrm>
+            <a:off x="1260000" y="684000"/>
+            <a:ext cx="1800000" cy="133351"/>
+          </a:xfrm>
+          <a:prstGeom prst="rect">
+            <a:avLst/>
+          </a:prstGeom>
+          <a:noFill/>
+        </p:spPr>
+        <p:txBody>
+          <a:bodyPr wrap="square" lIns="0" rIns="0" tIns="0" bIns="0" anchor="t">
+            <a:spAutoFit/>
+          </a:bodyPr>
+          <a:lstStyle/>
+          <a:p>
+            <a:pPr algn="l">
+              <a:lnSpc>
+                <a:spcPts val="1015"/>
+              </a:lnSpc>
+            </a:pPr>
+            <a:r>
+              <a:rPr sz="700" b="0" spc="60">
+                <a:solidFill>
+                  <a:srgbClr val="F8C5E6"/>
+                </a:solidFill>
+                <a:latin typeface="맑은 고딕"/>
+                <a:ea typeface="맑은 고딕"/>
+              </a:rPr>
+              <a:t>브런치 카페 대표</a:t>
+            </a:r>
+          </a:p>
+        </p:txBody>
+      </p:sp>
+      <p:cxnSp>
+        <p:nvCxnSpPr>
+          <p:cNvPr id="9" name="Connector 8"/>
+          <p:cNvCxnSpPr/>
+          <p:nvPr/>
+        </p:nvCxnSpPr>
+        <p:spPr>
+          <a:xfrm>
+            <a:off x="1260000" y="943200"/>
+            <a:ext cx="1728000" cy="0"/>
+          </a:xfrm>
+          <a:prstGeom prst="line">
+            <a:avLst/>
+          </a:prstGeom>
+          <a:ln w="3600">
+            <a:solidFill>
+              <a:srgbClr val="EF73C3"/>
+            </a:solidFill>
+          </a:ln>
+        </p:spPr>
+      </p:cxnSp>
+      <p:sp>
+        <p:nvSpPr>
+          <p:cNvPr id="10" name="텍스트"/>
+          <p:cNvSpPr txBox="1"/>
+          <p:nvPr/>
+        </p:nvSpPr>
+        <p:spPr>
+          <a:xfrm>
+            <a:off x="1260000" y="1054800"/>
+            <a:ext cx="331200" cy="91441"/>
+          </a:xfrm>
+          <a:prstGeom prst="rect">
+            <a:avLst/>
+          </a:prstGeom>
+          <a:noFill/>
+        </p:spPr>
+        <p:txBody>
+          <a:bodyPr wrap="square" lIns="0" rIns="0" tIns="0" bIns="0" anchor="t">
+            <a:spAutoFit/>
+          </a:bodyPr>
+          <a:lstStyle/>
+          <a:p>
+            <a:pPr algn="l">
+              <a:lnSpc>
+                <a:spcPts val="696"/>
+              </a:lnSpc>
+            </a:pPr>
+            <a:r>
+              <a:rPr sz="480" b="1" spc="140">
                 <a:solidFill>
                   <a:srgbClr val="F8C5E6"/>
                 </a:solidFill>
@@ -3348,14 +3399,14 @@
       </p:sp>
       <p:sp>
         <p:nvSpPr>
-          <p:cNvPr id="9" name="텍스트"/>
+          <p:cNvPr id="11" name="텍스트"/>
           <p:cNvSpPr txBox="1"/>
           <p:nvPr/>
         </p:nvSpPr>
         <p:spPr>
           <a:xfrm>
-            <a:off x="2023200" y="1317600"/>
-            <a:ext cx="1188000" cy="125731"/>
+            <a:off x="1591200" y="1044000"/>
+            <a:ext cx="1188000" cy="123826"/>
           </a:xfrm>
           <a:prstGeom prst="rect">
             <a:avLst/>
@@ -3370,11 +3421,11 @@
           <a:p>
             <a:pPr algn="l">
               <a:lnSpc>
-                <a:spcPts val="956"/>
+                <a:spcPts val="942"/>
               </a:lnSpc>
             </a:pPr>
             <a:r>
-              <a:rPr sz="660" b="0">
+              <a:rPr sz="650" b="0">
                 <a:solidFill>
                   <a:srgbClr val="FFFFFF"/>
                 </a:solidFill>
@@ -3388,14 +3439,14 @@
       </p:sp>
       <p:sp>
         <p:nvSpPr>
-          <p:cNvPr id="10" name="텍스트"/>
+          <p:cNvPr id="12" name="텍스트"/>
           <p:cNvSpPr txBox="1"/>
           <p:nvPr/>
         </p:nvSpPr>
         <p:spPr>
           <a:xfrm>
-            <a:off x="1692000" y="1458000"/>
-            <a:ext cx="331200" cy="99061"/>
+            <a:off x="1260000" y="1184400"/>
+            <a:ext cx="331200" cy="91441"/>
           </a:xfrm>
           <a:prstGeom prst="rect">
             <a:avLst/>
@@ -3410,11 +3461,11 @@
           <a:p>
             <a:pPr algn="l">
               <a:lnSpc>
-                <a:spcPts val="754"/>
+                <a:spcPts val="696"/>
               </a:lnSpc>
             </a:pPr>
             <a:r>
-              <a:rPr sz="520" b="1" spc="120">
+              <a:rPr sz="480" b="1" spc="140">
                 <a:solidFill>
                   <a:srgbClr val="F8C5E6"/>
                 </a:solidFill>
@@ -3428,14 +3479,14 @@
       </p:sp>
       <p:sp>
         <p:nvSpPr>
-          <p:cNvPr id="11" name="텍스트"/>
+          <p:cNvPr id="13" name="텍스트"/>
           <p:cNvSpPr txBox="1"/>
           <p:nvPr/>
         </p:nvSpPr>
         <p:spPr>
           <a:xfrm>
-            <a:off x="2023200" y="1447200"/>
-            <a:ext cx="1188000" cy="125731"/>
+            <a:off x="1591200" y="1173600"/>
+            <a:ext cx="1188000" cy="123826"/>
           </a:xfrm>
           <a:prstGeom prst="rect">
             <a:avLst/>
@@ -3450,11 +3501,11 @@
           <a:p>
             <a:pPr algn="l">
               <a:lnSpc>
-                <a:spcPts val="956"/>
+                <a:spcPts val="942"/>
               </a:lnSpc>
             </a:pPr>
             <a:r>
-              <a:rPr sz="660" b="0">
+              <a:rPr sz="650" b="0">
                 <a:solidFill>
                   <a:srgbClr val="FFFFFF"/>
                 </a:solidFill>
@@ -3468,14 +3519,14 @@
       </p:sp>
       <p:sp>
         <p:nvSpPr>
-          <p:cNvPr id="12" name="텍스트"/>
+          <p:cNvPr id="14" name="텍스트"/>
           <p:cNvSpPr txBox="1"/>
           <p:nvPr/>
         </p:nvSpPr>
         <p:spPr>
           <a:xfrm>
-            <a:off x="1692000" y="1587600"/>
-            <a:ext cx="331200" cy="99061"/>
+            <a:off x="1260000" y="1314000"/>
+            <a:ext cx="331200" cy="91441"/>
           </a:xfrm>
           <a:prstGeom prst="rect">
             <a:avLst/>
@@ -3490,11 +3541,11 @@
           <a:p>
             <a:pPr algn="l">
               <a:lnSpc>
-                <a:spcPts val="754"/>
+                <a:spcPts val="696"/>
               </a:lnSpc>
             </a:pPr>
             <a:r>
-              <a:rPr sz="520" b="1" spc="120">
+              <a:rPr sz="480" b="1" spc="140">
                 <a:solidFill>
                   <a:srgbClr val="F8C5E6"/>
                 </a:solidFill>
@@ -3508,14 +3559,14 @@
       </p:sp>
       <p:sp>
         <p:nvSpPr>
-          <p:cNvPr id="13" name="텍스트"/>
+          <p:cNvPr id="15" name="텍스트"/>
           <p:cNvSpPr txBox="1"/>
           <p:nvPr/>
         </p:nvSpPr>
         <p:spPr>
           <a:xfrm>
-            <a:off x="2023200" y="1576800"/>
-            <a:ext cx="1188000" cy="125731"/>
+            <a:off x="1591200" y="1303200"/>
+            <a:ext cx="1188000" cy="123826"/>
           </a:xfrm>
           <a:prstGeom prst="rect">
             <a:avLst/>
@@ -3530,11 +3581,11 @@
           <a:p>
             <a:pPr algn="l">
               <a:lnSpc>
-                <a:spcPts val="956"/>
+                <a:spcPts val="942"/>
               </a:lnSpc>
             </a:pPr>
             <a:r>
-              <a:rPr sz="660" b="0">
+              <a:rPr sz="650" b="0">
                 <a:solidFill>
                   <a:srgbClr val="FFFFFF"/>
                 </a:solidFill>
@@ -3572,18 +3623,226 @@
         <p:nvPr/>
       </p:nvGrpSpPr>
       <p:grpSpPr/>
-      <p:sp>
-        <p:nvSpPr>
-          <p:cNvPr id="2" name="Oval 1"/>
+      <p:cxnSp>
+        <p:nvCxnSpPr>
+          <p:cNvPr id="2" name="Connector 1"/>
+          <p:cNvCxnSpPr/>
+          <p:nvPr/>
+        </p:nvCxnSpPr>
+        <p:spPr>
+          <a:xfrm>
+            <a:off x="93600" y="122400"/>
+            <a:ext cx="57600" cy="0"/>
+          </a:xfrm>
+          <a:prstGeom prst="line">
+            <a:avLst/>
+          </a:prstGeom>
+          <a:ln w="3600">
+            <a:solidFill>
+              <a:srgbClr val="E3E5E9"/>
+            </a:solidFill>
+          </a:ln>
+        </p:spPr>
+      </p:cxnSp>
+      <p:cxnSp>
+        <p:nvCxnSpPr>
+          <p:cNvPr id="3" name="Connector 2"/>
+          <p:cNvCxnSpPr/>
+          <p:nvPr/>
+        </p:nvCxnSpPr>
+        <p:spPr>
+          <a:xfrm>
+            <a:off x="122400" y="93600"/>
+            <a:ext cx="0" cy="57600"/>
+          </a:xfrm>
+          <a:prstGeom prst="line">
+            <a:avLst/>
+          </a:prstGeom>
+          <a:ln w="3600">
+            <a:solidFill>
+              <a:srgbClr val="E3E5E9"/>
+            </a:solidFill>
+          </a:ln>
+        </p:spPr>
+      </p:cxnSp>
+      <p:cxnSp>
+        <p:nvCxnSpPr>
+          <p:cNvPr id="4" name="Connector 3"/>
+          <p:cNvCxnSpPr/>
+          <p:nvPr/>
+        </p:nvCxnSpPr>
+        <p:spPr>
+          <a:xfrm>
+            <a:off x="3088800" y="122400"/>
+            <a:ext cx="57600" cy="0"/>
+          </a:xfrm>
+          <a:prstGeom prst="line">
+            <a:avLst/>
+          </a:prstGeom>
+          <a:ln w="3600">
+            <a:solidFill>
+              <a:srgbClr val="E3E5E9"/>
+            </a:solidFill>
+          </a:ln>
+        </p:spPr>
+      </p:cxnSp>
+      <p:cxnSp>
+        <p:nvCxnSpPr>
+          <p:cNvPr id="5" name="Connector 4"/>
+          <p:cNvCxnSpPr/>
+          <p:nvPr/>
+        </p:nvCxnSpPr>
+        <p:spPr>
+          <a:xfrm>
+            <a:off x="3117600" y="93600"/>
+            <a:ext cx="0" cy="57600"/>
+          </a:xfrm>
+          <a:prstGeom prst="line">
+            <a:avLst/>
+          </a:prstGeom>
+          <a:ln w="3600">
+            <a:solidFill>
+              <a:srgbClr val="E3E5E9"/>
+            </a:solidFill>
+          </a:ln>
+        </p:spPr>
+      </p:cxnSp>
+      <p:cxnSp>
+        <p:nvCxnSpPr>
+          <p:cNvPr id="6" name="Connector 5"/>
+          <p:cNvCxnSpPr/>
+          <p:nvPr/>
+        </p:nvCxnSpPr>
+        <p:spPr>
+          <a:xfrm>
+            <a:off x="93600" y="1677600"/>
+            <a:ext cx="57600" cy="0"/>
+          </a:xfrm>
+          <a:prstGeom prst="line">
+            <a:avLst/>
+          </a:prstGeom>
+          <a:ln w="3600">
+            <a:solidFill>
+              <a:srgbClr val="E3E5E9"/>
+            </a:solidFill>
+          </a:ln>
+        </p:spPr>
+      </p:cxnSp>
+      <p:cxnSp>
+        <p:nvCxnSpPr>
+          <p:cNvPr id="7" name="Connector 6"/>
+          <p:cNvCxnSpPr/>
+          <p:nvPr/>
+        </p:nvCxnSpPr>
+        <p:spPr>
+          <a:xfrm>
+            <a:off x="122400" y="1648800"/>
+            <a:ext cx="0" cy="57600"/>
+          </a:xfrm>
+          <a:prstGeom prst="line">
+            <a:avLst/>
+          </a:prstGeom>
+          <a:ln w="3600">
+            <a:solidFill>
+              <a:srgbClr val="E3E5E9"/>
+            </a:solidFill>
+          </a:ln>
+        </p:spPr>
+      </p:cxnSp>
+      <p:cxnSp>
+        <p:nvCxnSpPr>
+          <p:cNvPr id="8" name="Connector 7"/>
+          <p:cNvCxnSpPr/>
+          <p:nvPr/>
+        </p:nvCxnSpPr>
+        <p:spPr>
+          <a:xfrm>
+            <a:off x="3088800" y="1677600"/>
+            <a:ext cx="57600" cy="0"/>
+          </a:xfrm>
+          <a:prstGeom prst="line">
+            <a:avLst/>
+          </a:prstGeom>
+          <a:ln w="3600">
+            <a:solidFill>
+              <a:srgbClr val="E3E5E9"/>
+            </a:solidFill>
+          </a:ln>
+        </p:spPr>
+      </p:cxnSp>
+      <p:cxnSp>
+        <p:nvCxnSpPr>
+          <p:cNvPr id="9" name="Connector 8"/>
+          <p:cNvCxnSpPr/>
+          <p:nvPr/>
+        </p:nvCxnSpPr>
+        <p:spPr>
+          <a:xfrm>
+            <a:off x="3117600" y="1648800"/>
+            <a:ext cx="0" cy="57600"/>
+          </a:xfrm>
+          <a:prstGeom prst="line">
+            <a:avLst/>
+          </a:prstGeom>
+          <a:ln w="3600">
+            <a:solidFill>
+              <a:srgbClr val="E3E5E9"/>
+            </a:solidFill>
+          </a:ln>
+        </p:spPr>
+      </p:cxnSp>
+      <p:sp>
+        <p:nvSpPr>
+          <p:cNvPr id="10" name="텍스트"/>
+          <p:cNvSpPr txBox="1"/>
+          <p:nvPr/>
+        </p:nvSpPr>
+        <p:spPr>
+          <a:xfrm>
+            <a:off x="360000" y="331200"/>
+            <a:ext cx="2520000" cy="99061"/>
+          </a:xfrm>
+          <a:prstGeom prst="rect">
+            <a:avLst/>
+          </a:prstGeom>
+          <a:noFill/>
+        </p:spPr>
+        <p:txBody>
+          <a:bodyPr wrap="square" lIns="0" rIns="0" tIns="0" bIns="0" anchor="t">
+            <a:spAutoFit/>
+          </a:bodyPr>
+          <a:lstStyle/>
+          <a:p>
+            <a:pPr algn="ctr">
+              <a:lnSpc>
+                <a:spcPts val="754"/>
+              </a:lnSpc>
+            </a:pPr>
+            <a:r>
+              <a:rPr sz="520" b="1" spc="240">
+                <a:solidFill>
+                  <a:srgbClr val="6B7280"/>
+                </a:solidFill>
+                <a:latin typeface="맑은 고딕"/>
+                <a:ea typeface="맑은 고딕"/>
+              </a:rPr>
+              <a:t>대표 메뉴</a:t>
+            </a:r>
+          </a:p>
+        </p:txBody>
+      </p:sp>
+      <p:sp>
+        <p:nvSpPr>
+          <p:cNvPr id="11" name="Rectangle 10"/>
           <p:cNvSpPr/>
           <p:nvPr/>
         </p:nvSpPr>
         <p:spPr>
           <a:xfrm>
-            <a:off x="1591200" y="511200"/>
-            <a:ext cx="57600" cy="57600"/>
-          </a:xfrm>
-          <a:prstGeom prst="ellipse">
+            <a:off x="1530000" y="453600"/>
+            <a:ext cx="180000" cy="14400"/>
+          </a:xfrm>
+          <a:prstGeom prst="rect">
             <a:avLst/>
           </a:prstGeom>
           <a:solidFill>
@@ -3603,14 +3862,14 @@
       </p:sp>
       <p:sp>
         <p:nvSpPr>
-          <p:cNvPr id="3" name="텍스트"/>
+          <p:cNvPr id="12" name="텍스트"/>
           <p:cNvSpPr txBox="1"/>
           <p:nvPr/>
         </p:nvSpPr>
         <p:spPr>
           <a:xfrm>
-            <a:off x="396000" y="684000"/>
-            <a:ext cx="2448000" cy="504000"/>
+            <a:off x="360000" y="684000"/>
+            <a:ext cx="630000" cy="216000"/>
           </a:xfrm>
           <a:prstGeom prst="rect">
             <a:avLst/>
@@ -3618,38 +3877,322 @@
           <a:noFill/>
         </p:spPr>
         <p:txBody>
-          <a:bodyPr wrap="square" lIns="0" rIns="0" tIns="0" bIns="0" anchor="t">
+          <a:bodyPr wrap="square" lIns="0" rIns="0" tIns="0" bIns="0" anchor="ctr">
             <a:spAutoFit/>
           </a:bodyPr>
           <a:lstStyle/>
           <a:p>
             <a:pPr algn="ctr">
               <a:lnSpc>
-                <a:spcPts val="1739"/>
+                <a:spcPts val="1015"/>
               </a:lnSpc>
             </a:pPr>
             <a:r>
-              <a:rPr sz="1200" b="1">
+              <a:rPr sz="700" b="1">
                 <a:solidFill>
                   <a:srgbClr val="12151C"/>
                 </a:solidFill>
                 <a:latin typeface="맑은 고딕"/>
                 <a:ea typeface="맑은 고딕"/>
               </a:rPr>
-              <a:t>오래 기억될 한 그릇</a:t>
-            </a:r>
-          </a:p>
-        </p:txBody>
-      </p:sp>
-      <p:sp>
-        <p:nvSpPr>
-          <p:cNvPr id="4" name="텍스트"/>
+              <a:t>수제 디저트</a:t>
+            </a:r>
+          </a:p>
+        </p:txBody>
+      </p:sp>
+      <p:sp>
+        <p:nvSpPr>
+          <p:cNvPr id="13" name="텍스트"/>
           <p:cNvSpPr txBox="1"/>
           <p:nvPr/>
         </p:nvSpPr>
         <p:spPr>
           <a:xfrm>
-            <a:off x="360000" y="1339200"/>
+            <a:off x="990000" y="684000"/>
+            <a:ext cx="630000" cy="216000"/>
+          </a:xfrm>
+          <a:prstGeom prst="rect">
+            <a:avLst/>
+          </a:prstGeom>
+          <a:noFill/>
+        </p:spPr>
+        <p:txBody>
+          <a:bodyPr wrap="square" lIns="0" rIns="0" tIns="0" bIns="0" anchor="ctr">
+            <a:spAutoFit/>
+          </a:bodyPr>
+          <a:lstStyle/>
+          <a:p>
+            <a:pPr algn="ctr">
+              <a:lnSpc>
+                <a:spcPts val="1015"/>
+              </a:lnSpc>
+            </a:pPr>
+            <a:r>
+              <a:rPr sz="700" b="1">
+                <a:solidFill>
+                  <a:srgbClr val="12151C"/>
+                </a:solidFill>
+                <a:latin typeface="맑은 고딕"/>
+                <a:ea typeface="맑은 고딕"/>
+              </a:rPr>
+              <a:t>포장 · 배달</a:t>
+            </a:r>
+          </a:p>
+        </p:txBody>
+      </p:sp>
+      <p:cxnSp>
+        <p:nvCxnSpPr>
+          <p:cNvPr id="14" name="Connector 13"/>
+          <p:cNvCxnSpPr/>
+          <p:nvPr/>
+        </p:nvCxnSpPr>
+        <p:spPr>
+          <a:xfrm>
+            <a:off x="990000" y="676800"/>
+            <a:ext cx="0" cy="230400"/>
+          </a:xfrm>
+          <a:prstGeom prst="line">
+            <a:avLst/>
+          </a:prstGeom>
+          <a:ln w="3600">
+            <a:solidFill>
+              <a:srgbClr val="E3E5E9"/>
+            </a:solidFill>
+          </a:ln>
+        </p:spPr>
+      </p:cxnSp>
+      <p:sp>
+        <p:nvSpPr>
+          <p:cNvPr id="15" name="텍스트"/>
+          <p:cNvSpPr txBox="1"/>
+          <p:nvPr/>
+        </p:nvSpPr>
+        <p:spPr>
+          <a:xfrm>
+            <a:off x="1620000" y="684000"/>
+            <a:ext cx="630000" cy="216000"/>
+          </a:xfrm>
+          <a:prstGeom prst="rect">
+            <a:avLst/>
+          </a:prstGeom>
+          <a:noFill/>
+        </p:spPr>
+        <p:txBody>
+          <a:bodyPr wrap="square" lIns="0" rIns="0" tIns="0" bIns="0" anchor="ctr">
+            <a:spAutoFit/>
+          </a:bodyPr>
+          <a:lstStyle/>
+          <a:p>
+            <a:pPr algn="ctr">
+              <a:lnSpc>
+                <a:spcPts val="1015"/>
+              </a:lnSpc>
+            </a:pPr>
+            <a:r>
+              <a:rPr sz="700" b="1">
+                <a:solidFill>
+                  <a:srgbClr val="12151C"/>
+                </a:solidFill>
+                <a:latin typeface="맑은 고딕"/>
+                <a:ea typeface="맑은 고딕"/>
+              </a:rPr>
+              <a:t>런치 세트</a:t>
+            </a:r>
+          </a:p>
+        </p:txBody>
+      </p:sp>
+      <p:cxnSp>
+        <p:nvCxnSpPr>
+          <p:cNvPr id="16" name="Connector 15"/>
+          <p:cNvCxnSpPr/>
+          <p:nvPr/>
+        </p:nvCxnSpPr>
+        <p:spPr>
+          <a:xfrm>
+            <a:off x="1620000" y="676800"/>
+            <a:ext cx="0" cy="230400"/>
+          </a:xfrm>
+          <a:prstGeom prst="line">
+            <a:avLst/>
+          </a:prstGeom>
+          <a:ln w="3600">
+            <a:solidFill>
+              <a:srgbClr val="E3E5E9"/>
+            </a:solidFill>
+          </a:ln>
+        </p:spPr>
+      </p:cxnSp>
+      <p:sp>
+        <p:nvSpPr>
+          <p:cNvPr id="17" name="텍스트"/>
+          <p:cNvSpPr txBox="1"/>
+          <p:nvPr/>
+        </p:nvSpPr>
+        <p:spPr>
+          <a:xfrm>
+            <a:off x="2250000" y="684000"/>
+            <a:ext cx="630000" cy="216000"/>
+          </a:xfrm>
+          <a:prstGeom prst="rect">
+            <a:avLst/>
+          </a:prstGeom>
+          <a:noFill/>
+        </p:spPr>
+        <p:txBody>
+          <a:bodyPr wrap="square" lIns="0" rIns="0" tIns="0" bIns="0" anchor="ctr">
+            <a:spAutoFit/>
+          </a:bodyPr>
+          <a:lstStyle/>
+          <a:p>
+            <a:pPr algn="ctr">
+              <a:lnSpc>
+                <a:spcPts val="1015"/>
+              </a:lnSpc>
+            </a:pPr>
+            <a:r>
+              <a:rPr sz="700" b="1">
+                <a:solidFill>
+                  <a:srgbClr val="12151C"/>
+                </a:solidFill>
+                <a:latin typeface="맑은 고딕"/>
+                <a:ea typeface="맑은 고딕"/>
+              </a:rPr>
+              <a:t>시즌 메뉴</a:t>
+            </a:r>
+          </a:p>
+        </p:txBody>
+      </p:sp>
+      <p:cxnSp>
+        <p:nvCxnSpPr>
+          <p:cNvPr id="18" name="Connector 17"/>
+          <p:cNvCxnSpPr/>
+          <p:nvPr/>
+        </p:nvCxnSpPr>
+        <p:spPr>
+          <a:xfrm>
+            <a:off x="2250000" y="676800"/>
+            <a:ext cx="0" cy="230400"/>
+          </a:xfrm>
+          <a:prstGeom prst="line">
+            <a:avLst/>
+          </a:prstGeom>
+          <a:ln w="3600">
+            <a:solidFill>
+              <a:srgbClr val="E3E5E9"/>
+            </a:solidFill>
+          </a:ln>
+        </p:spPr>
+      </p:cxnSp>
+      <p:cxnSp>
+        <p:nvCxnSpPr>
+          <p:cNvPr id="19" name="Connector 18"/>
+          <p:cNvCxnSpPr/>
+          <p:nvPr/>
+        </p:nvCxnSpPr>
+        <p:spPr>
+          <a:xfrm>
+            <a:off x="360000" y="1159200"/>
+            <a:ext cx="2520000" cy="0"/>
+          </a:xfrm>
+          <a:prstGeom prst="line">
+            <a:avLst/>
+          </a:prstGeom>
+          <a:ln w="3600">
+            <a:solidFill>
+              <a:srgbClr val="E3E5E9"/>
+            </a:solidFill>
+          </a:ln>
+        </p:spPr>
+      </p:cxnSp>
+      <p:sp>
+        <p:nvSpPr>
+          <p:cNvPr id="20" name="텍스트"/>
+          <p:cNvSpPr txBox="1"/>
+          <p:nvPr/>
+        </p:nvSpPr>
+        <p:spPr>
+          <a:xfrm>
+            <a:off x="360000" y="1245600"/>
+            <a:ext cx="1224000" cy="118111"/>
+          </a:xfrm>
+          <a:prstGeom prst="rect">
+            <a:avLst/>
+          </a:prstGeom>
+          <a:noFill/>
+        </p:spPr>
+        <p:txBody>
+          <a:bodyPr wrap="square" lIns="0" rIns="0" tIns="0" bIns="0" anchor="t">
+            <a:spAutoFit/>
+          </a:bodyPr>
+          <a:lstStyle/>
+          <a:p>
+            <a:pPr algn="ctr">
+              <a:lnSpc>
+                <a:spcPts val="899"/>
+              </a:lnSpc>
+            </a:pPr>
+            <a:r>
+              <a:rPr sz="620" b="0">
+                <a:solidFill>
+                  <a:srgbClr val="12151C"/>
+                </a:solidFill>
+                <a:latin typeface="맑은 고딕"/>
+                <a:ea typeface="맑은 고딕"/>
+              </a:rPr>
+              <a:t>매일 10:00 – 22:00</a:t>
+            </a:r>
+          </a:p>
+        </p:txBody>
+      </p:sp>
+      <p:sp>
+        <p:nvSpPr>
+          <p:cNvPr id="21" name="텍스트"/>
+          <p:cNvSpPr txBox="1"/>
+          <p:nvPr/>
+        </p:nvSpPr>
+        <p:spPr>
+          <a:xfrm>
+            <a:off x="1656000" y="1245600"/>
+            <a:ext cx="1224000" cy="118111"/>
+          </a:xfrm>
+          <a:prstGeom prst="rect">
+            <a:avLst/>
+          </a:prstGeom>
+          <a:noFill/>
+        </p:spPr>
+        <p:txBody>
+          <a:bodyPr wrap="square" lIns="0" rIns="0" tIns="0" bIns="0" anchor="t">
+            <a:spAutoFit/>
+          </a:bodyPr>
+          <a:lstStyle/>
+          <a:p>
+            <a:pPr algn="ctr">
+              <a:lnSpc>
+                <a:spcPts val="899"/>
+              </a:lnSpc>
+            </a:pPr>
+            <a:r>
+              <a:rPr sz="620" b="0">
+                <a:solidFill>
+                  <a:srgbClr val="12151C"/>
+                </a:solidFill>
+                <a:latin typeface="맑은 고딕"/>
+                <a:ea typeface="맑은 고딕"/>
+              </a:rPr>
+              <a:t>INSTAGRAM  @아이디</a:t>
+            </a:r>
+          </a:p>
+        </p:txBody>
+      </p:sp>
+      <p:sp>
+        <p:nvSpPr>
+          <p:cNvPr id="22" name="텍스트"/>
+          <p:cNvSpPr txBox="1"/>
+          <p:nvPr/>
+        </p:nvSpPr>
+        <p:spPr>
+          <a:xfrm>
+            <a:off x="360000" y="1526400"/>
             <a:ext cx="2520000" cy="123826"/>
           </a:xfrm>
           <a:prstGeom prst="rect">
@@ -3669,7 +4212,7 @@
               </a:lnSpc>
             </a:pPr>
             <a:r>
-              <a:rPr sz="650" b="1" spc="300">
+              <a:rPr sz="650" b="1" spc="220">
                 <a:solidFill>
                   <a:srgbClr val="6B7280"/>
                 </a:solidFill>
